--- a/doc/gui/Architektura_DriveWise_AI.pptx
+++ b/doc/gui/Architektura_DriveWise_AI.pptx
@@ -15,6 +15,8 @@
     <p:sldId id="263" r:id="rId9"/>
     <p:sldId id="264" r:id="rId10"/>
     <p:sldId id="265" r:id="rId11"/>
+    <p:sldId id="267" r:id="rId18"/>
+    <p:sldId id="268" r:id="rId19"/>
     <p:sldId id="266" r:id="rId12"/>
   </p:sldIdLst>
   <p:notesMasterIdLst>
@@ -2011,7 +2013,7 @@
                 <a:ea typeface="IBM Plex Sans" pitchFamily="34" charset="-122"/>
                 <a:cs typeface="IBM Plex Sans" pitchFamily="34" charset="-120"/>
               </a:rPr>
-              <a:t>Stav k 20. 9. 2026 · FastAPI · NiceGUI · Claude API · samostatný scraper</a:t>
+              <a:t>Stav k 22. 9. 2026 · FastAPI · NiceGUI · Claude API · samostatný scraper</a:t>
             </a:r>
             <a:endParaRPr lang="en-US" sz="1300" dirty="0"/>
           </a:p>
@@ -3090,7 +3092,2047 @@
                 <a:ea typeface="IBM Plex Sans" pitchFamily="34" charset="-122"/>
                 <a:cs typeface="IBM Plex Sans" pitchFamily="34" charset="-120"/>
               </a:rPr>
+              <a:t>DriveWise AI · Architektura · 13</a:t>
+            </a:r>
+            <a:endParaRPr lang="en-US" sz="1200" dirty="0"/>
+          </a:p>
+        </p:txBody>
+      </p:sp>
+    </p:spTree>
+  </p:cSld>
+  <p:clrMapOvr>
+    <a:masterClrMapping/>
+  </p:clrMapOvr>
+</p:sld>
+</file>
+
+<file path=ppt/slides/slide12.xml><?xml version="1.0" encoding="utf-8"?>
+<p:sld xmlns:a="http://schemas.openxmlformats.org/drawingml/2006/main" xmlns:r="http://schemas.openxmlformats.org/officeDocument/2006/relationships" xmlns:p="http://schemas.openxmlformats.org/presentationml/2006/main">
+  <p:cSld name="Slide 11">
+    <p:bg>
+      <p:bgPr>
+        <a:solidFill>
+          <a:srgbClr val="F6F5F0"/>
+        </a:solidFill>
+      </p:bgPr>
+    </p:bg>
+    <p:spTree>
+      <p:nvGrpSpPr>
+        <p:cNvPr id="1" name=""/>
+        <p:cNvGrpSpPr/>
+        <p:nvPr/>
+      </p:nvGrpSpPr>
+      <p:grpSpPr>
+        <a:xfrm>
+          <a:off x="0" y="0"/>
+          <a:ext cx="0" cy="0"/>
+          <a:chOff x="0" y="0"/>
+          <a:chExt cx="0" cy="0"/>
+        </a:xfrm>
+      </p:grpSpPr>
+      <p:sp>
+        <p:nvSpPr>
+          <p:cNvPr id="2" name="Text 0"/>
+          <p:cNvSpPr/>
+          <p:nvPr/>
+        </p:nvSpPr>
+        <p:spPr>
+          <a:xfrm>
+            <a:off x="812800" y="812800"/>
+            <a:ext cx="10883392" cy="492760"/>
+          </a:xfrm>
+          <a:prstGeom prst="rect">
+            <a:avLst/>
+          </a:prstGeom>
+          <a:noFill/>
+          <a:ln/>
+        </p:spPr>
+        <p:txBody>
+          <a:bodyPr wrap="square" lIns="0" tIns="0" rIns="0" bIns="0" rtlCol="0" anchor="t">
+            <a:normAutofit/>
+          </a:bodyPr>
+          <a:lstStyle/>
+          <a:p>
+            <a:pPr algn="l" indent="0" marL="0">
+              <a:lnSpc>
+                <a:spcPts val="3680"/>
+              </a:lnSpc>
+              <a:buNone/>
+            </a:pPr>
+            <a:r>
+              <a:rPr lang="en-US" sz="3200" b="1" dirty="0">
+                <a:solidFill>
+                  <a:srgbClr val="14213D"/>
+                </a:solidFill>
+                <a:latin typeface="IBM Plex Sans" pitchFamily="34" charset="0"/>
+                <a:ea typeface="IBM Plex Sans" pitchFamily="34" charset="-122"/>
+                <a:cs typeface="IBM Plex Sans" pitchFamily="34" charset="-120"/>
+              </a:rPr>
+              <a:t>Nové: přihlášení a e-mail</a:t>
+            </a:r>
+            <a:endParaRPr lang="en-US" sz="3200" dirty="0"/>
+          </a:p>
+        </p:txBody>
+      </p:sp>
+      <p:sp>
+        <p:nvSpPr>
+          <p:cNvPr id="3" name="Shape 1"/>
+          <p:cNvSpPr/>
+          <p:nvPr/>
+        </p:nvSpPr>
+        <p:spPr>
+          <a:xfrm>
+            <a:off x="812800" y="1483361"/>
+            <a:ext cx="2524760" cy="2341880"/>
+          </a:xfrm>
+          <a:prstGeom prst="roundRect">
+            <a:avLst>
+              <a:gd name="adj" fmla="val 5423"/>
+            </a:avLst>
+          </a:prstGeom>
+          <a:solidFill>
+            <a:srgbClr val="D8EBE7"/>
+          </a:solidFill>
+          <a:ln/>
+        </p:spPr>
+      </p:sp>
+      <p:sp>
+        <p:nvSpPr>
+          <p:cNvPr id="4" name="Text 2"/>
+          <p:cNvSpPr/>
+          <p:nvPr/>
+        </p:nvSpPr>
+        <p:spPr>
+          <a:xfrm>
+            <a:off x="990600" y="1661161"/>
+            <a:ext cx="2234235" cy="254000"/>
+          </a:xfrm>
+          <a:prstGeom prst="rect">
+            <a:avLst/>
+          </a:prstGeom>
+          <a:noFill/>
+          <a:ln/>
+        </p:spPr>
+        <p:txBody>
+          <a:bodyPr wrap="square" lIns="0" tIns="0" rIns="0" bIns="0" rtlCol="0" anchor="t">
+            <a:normAutofit/>
+          </a:bodyPr>
+          <a:lstStyle/>
+          <a:p>
+            <a:pPr algn="l" indent="0" marL="0">
+              <a:lnSpc>
+                <a:spcPts val="1800"/>
+              </a:lnSpc>
+              <a:buNone/>
+            </a:pPr>
+            <a:r>
+              <a:rPr lang="en-US" sz="1500" b="1" dirty="0">
+                <a:solidFill>
+                  <a:srgbClr val="14213D"/>
+                </a:solidFill>
+                <a:latin typeface="JetBrains Mono" pitchFamily="34" charset="0"/>
+                <a:ea typeface="JetBrains Mono" pitchFamily="34" charset="-122"/>
+                <a:cs typeface="JetBrains Mono" pitchFamily="34" charset="-120"/>
+              </a:rPr>
+              <a:t>Přihlášení</a:t>
+            </a:r>
+            <a:endParaRPr lang="en-US" sz="1500" dirty="0"/>
+          </a:p>
+        </p:txBody>
+      </p:sp>
+      <p:sp>
+        <p:nvSpPr>
+          <p:cNvPr id="5" name="Text 3"/>
+          <p:cNvSpPr/>
+          <p:nvPr/>
+        </p:nvSpPr>
+        <p:spPr>
+          <a:xfrm>
+            <a:off x="990600" y="1965961"/>
+            <a:ext cx="2234235" cy="256540"/>
+          </a:xfrm>
+          <a:prstGeom prst="rect">
+            <a:avLst/>
+          </a:prstGeom>
+          <a:noFill/>
+          <a:ln/>
+        </p:spPr>
+        <p:txBody>
+          <a:bodyPr wrap="square" lIns="0" tIns="0" rIns="0" bIns="0" rtlCol="0" anchor="t">
+            <a:normAutofit/>
+          </a:bodyPr>
+          <a:lstStyle/>
+          <a:p>
+            <a:pPr algn="l" indent="0" marL="0">
+              <a:lnSpc>
+                <a:spcPts val="1820"/>
+              </a:lnSpc>
+              <a:buNone/>
+            </a:pPr>
+            <a:r>
+              <a:rPr lang="en-US" sz="1300" dirty="0">
+                <a:solidFill>
+                  <a:srgbClr val="14213D"/>
+                </a:solidFill>
+                <a:latin typeface="IBM Plex Sans" pitchFamily="34" charset="0"/>
+                <a:ea typeface="IBM Plex Sans" pitchFamily="34" charset="-122"/>
+                <a:cs typeface="IBM Plex Sans" pitchFamily="34" charset="-120"/>
+              </a:rPr>
+              <a:t>E-mail a jednorázový kód</a:t>
+            </a:r>
+            <a:endParaRPr lang="en-US" sz="1300" dirty="0"/>
+          </a:p>
+        </p:txBody>
+      </p:sp>
+      <p:sp>
+        <p:nvSpPr>
+          <p:cNvPr id="6" name="Text 4"/>
+          <p:cNvSpPr/>
+          <p:nvPr/>
+        </p:nvSpPr>
+        <p:spPr>
+          <a:xfrm>
+            <a:off x="990600" y="2273300"/>
+            <a:ext cx="2234235" cy="1397000"/>
+          </a:xfrm>
+          <a:prstGeom prst="rect">
+            <a:avLst/>
+          </a:prstGeom>
+          <a:noFill/>
+          <a:ln/>
+        </p:spPr>
+        <p:txBody>
+          <a:bodyPr wrap="square" lIns="0" tIns="0" rIns="0" bIns="0" rtlCol="0" anchor="t">
+            <a:normAutofit/>
+          </a:bodyPr>
+          <a:lstStyle/>
+          <a:p>
+            <a:pPr algn="l" marL="342900" indent="-342900">
+              <a:lnSpc>
+                <a:spcPts val="1800"/>
+              </a:lnSpc>
+              <a:buSzPct val="100000"/>
+              <a:buChar char="•"/>
+            </a:pPr>
+            <a:r>
+              <a:rPr lang="en-US" sz="1200" dirty="0">
+                <a:solidFill>
+                  <a:srgbClr val="14213D"/>
+                </a:solidFill>
+                <a:latin typeface="JetBrains Mono" pitchFamily="34" charset="0"/>
+                <a:ea typeface="JetBrains Mono" pitchFamily="34" charset="-122"/>
+                <a:cs typeface="JetBrains Mono" pitchFamily="34" charset="-120"/>
+              </a:rPr>
+              <a:t>users</a:t>
+            </a:r>
+            <a:endParaRPr lang="en-US" sz="1200" dirty="0"/>
+          </a:p>
+          <a:p>
+            <a:pPr algn="l" marL="342900" indent="-342900">
+              <a:lnSpc>
+                <a:spcPts val="1800"/>
+              </a:lnSpc>
+              <a:buSzPct val="100000"/>
+              <a:buChar char="•"/>
+            </a:pPr>
+            <a:r>
+              <a:rPr lang="en-US" sz="1200" dirty="0">
+                <a:solidFill>
+                  <a:srgbClr val="14213D"/>
+                </a:solidFill>
+                <a:latin typeface="JetBrains Mono" pitchFamily="34" charset="0"/>
+                <a:ea typeface="JetBrains Mono" pitchFamily="34" charset="-122"/>
+                <a:cs typeface="JetBrains Mono" pitchFamily="34" charset="-120"/>
+              </a:rPr>
+              <a:t>login_codes</a:t>
+            </a:r>
+            <a:endParaRPr lang="en-US" sz="1200" dirty="0"/>
+          </a:p>
+          <a:p>
+            <a:pPr algn="l" marL="342900" indent="-342900">
+              <a:lnSpc>
+                <a:spcPts val="1800"/>
+              </a:lnSpc>
+              <a:buSzPct val="100000"/>
+              <a:buChar char="•"/>
+            </a:pPr>
+            <a:r>
+              <a:rPr lang="en-US" sz="1200" dirty="0">
+                <a:solidFill>
+                  <a:srgbClr val="14213D"/>
+                </a:solidFill>
+                <a:latin typeface="JetBrains Mono" pitchFamily="34" charset="0"/>
+                <a:ea typeface="JetBrains Mono" pitchFamily="34" charset="-122"/>
+                <a:cs typeface="JetBrains Mono" pitchFamily="34" charset="-120"/>
+              </a:rPr>
+              <a:t>kód = 6 číslic</a:t>
+            </a:r>
+            <a:endParaRPr lang="en-US" sz="1200" dirty="0"/>
+          </a:p>
+          <a:p>
+            <a:pPr algn="l" marL="342900" indent="-342900">
+              <a:lnSpc>
+                <a:spcPts val="1800"/>
+              </a:lnSpc>
+              <a:buSzPct val="100000"/>
+              <a:buChar char="•"/>
+            </a:pPr>
+            <a:r>
+              <a:rPr lang="en-US" sz="1200" dirty="0">
+                <a:solidFill>
+                  <a:srgbClr val="14213D"/>
+                </a:solidFill>
+                <a:latin typeface="JetBrains Mono" pitchFamily="34" charset="0"/>
+                <a:ea typeface="JetBrains Mono" pitchFamily="34" charset="-122"/>
+                <a:cs typeface="JetBrains Mono" pitchFamily="34" charset="-120"/>
+              </a:rPr>
+              <a:t>jen HMAC hash</a:t>
+            </a:r>
+            <a:endParaRPr lang="en-US" sz="1200" dirty="0"/>
+          </a:p>
+          <a:p>
+            <a:pPr algn="l" marL="342900" indent="-342900">
+              <a:lnSpc>
+                <a:spcPts val="1800"/>
+              </a:lnSpc>
+              <a:buSzPct val="100000"/>
+              <a:buChar char="•"/>
+            </a:pPr>
+            <a:r>
+              <a:rPr lang="en-US" sz="1200" dirty="0">
+                <a:solidFill>
+                  <a:srgbClr val="14213D"/>
+                </a:solidFill>
+                <a:latin typeface="JetBrains Mono" pitchFamily="34" charset="0"/>
+                <a:ea typeface="JetBrains Mono" pitchFamily="34" charset="-122"/>
+                <a:cs typeface="JetBrains Mono" pitchFamily="34" charset="-120"/>
+              </a:rPr>
+              <a:t>10 min, 5 pokusů</a:t>
+            </a:r>
+            <a:endParaRPr lang="en-US" sz="1200" dirty="0"/>
+          </a:p>
+          <a:p>
+            <a:pPr algn="l" marL="342900" indent="-342900">
+              <a:lnSpc>
+                <a:spcPts val="1800"/>
+              </a:lnSpc>
+              <a:buSzPct val="100000"/>
+              <a:buChar char="•"/>
+            </a:pPr>
+            <a:r>
+              <a:rPr lang="en-US" sz="1200" dirty="0">
+                <a:solidFill>
+                  <a:srgbClr val="14213D"/>
+                </a:solidFill>
+                <a:latin typeface="JetBrains Mono" pitchFamily="34" charset="0"/>
+                <a:ea typeface="JetBrains Mono" pitchFamily="34" charset="-122"/>
+                <a:cs typeface="JetBrains Mono" pitchFamily="34" charset="-120"/>
+              </a:rPr>
+              <a:t>limit / hod, IP</a:t>
+            </a:r>
+            <a:endParaRPr lang="en-US" sz="1200" dirty="0"/>
+          </a:p>
+        </p:txBody>
+      </p:sp>
+      <p:sp>
+        <p:nvSpPr>
+          <p:cNvPr id="7" name="Shape 5"/>
+          <p:cNvSpPr/>
+          <p:nvPr/>
+        </p:nvSpPr>
+        <p:spPr>
+          <a:xfrm>
+            <a:off x="3493135" y="1486536"/>
+            <a:ext cx="2528570" cy="2335530"/>
+          </a:xfrm>
+          <a:prstGeom prst="roundRect">
+            <a:avLst>
+              <a:gd name="adj" fmla="val 5302"/>
+            </a:avLst>
+          </a:prstGeom>
+          <a:solidFill>
+            <a:srgbClr val="FCFBF7"/>
+          </a:solidFill>
+          <a:ln w="6350">
+            <a:solidFill>
+              <a:srgbClr val="DAD7CB"/>
+            </a:solidFill>
+            <a:prstDash val="solid"/>
+          </a:ln>
+        </p:spPr>
+      </p:sp>
+      <p:sp>
+        <p:nvSpPr>
+          <p:cNvPr id="8" name="Text 6"/>
+          <p:cNvSpPr/>
+          <p:nvPr/>
+        </p:nvSpPr>
+        <p:spPr>
+          <a:xfrm>
+            <a:off x="3672840" y="1666239"/>
+            <a:ext cx="2234235" cy="254000"/>
+          </a:xfrm>
+          <a:prstGeom prst="rect">
+            <a:avLst/>
+          </a:prstGeom>
+          <a:noFill/>
+          <a:ln/>
+        </p:spPr>
+        <p:txBody>
+          <a:bodyPr wrap="square" lIns="0" tIns="0" rIns="0" bIns="0" rtlCol="0" anchor="t">
+            <a:normAutofit/>
+          </a:bodyPr>
+          <a:lstStyle/>
+          <a:p>
+            <a:pPr algn="l" indent="0" marL="0">
+              <a:lnSpc>
+                <a:spcPts val="1800"/>
+              </a:lnSpc>
+              <a:buNone/>
+            </a:pPr>
+            <a:r>
+              <a:rPr lang="en-US" sz="1500" b="1" dirty="0">
+                <a:solidFill>
+                  <a:srgbClr val="14213D"/>
+                </a:solidFill>
+                <a:latin typeface="JetBrains Mono" pitchFamily="34" charset="0"/>
+                <a:ea typeface="JetBrains Mono" pitchFamily="34" charset="-122"/>
+                <a:cs typeface="JetBrains Mono" pitchFamily="34" charset="-120"/>
+              </a:rPr>
+              <a:t>E-mail</a:t>
+            </a:r>
+            <a:endParaRPr lang="en-US" sz="1500" dirty="0"/>
+          </a:p>
+        </p:txBody>
+      </p:sp>
+      <p:sp>
+        <p:nvSpPr>
+          <p:cNvPr id="9" name="Text 7"/>
+          <p:cNvSpPr/>
+          <p:nvPr/>
+        </p:nvSpPr>
+        <p:spPr>
+          <a:xfrm>
+            <a:off x="3672840" y="1971039"/>
+            <a:ext cx="2234235" cy="256540"/>
+          </a:xfrm>
+          <a:prstGeom prst="rect">
+            <a:avLst/>
+          </a:prstGeom>
+          <a:noFill/>
+          <a:ln/>
+        </p:spPr>
+        <p:txBody>
+          <a:bodyPr wrap="square" lIns="0" tIns="0" rIns="0" bIns="0" rtlCol="0" anchor="t">
+            <a:normAutofit/>
+          </a:bodyPr>
+          <a:lstStyle/>
+          <a:p>
+            <a:pPr algn="l" indent="0" marL="0">
+              <a:lnSpc>
+                <a:spcPts val="1820"/>
+              </a:lnSpc>
+              <a:buNone/>
+            </a:pPr>
+            <a:r>
+              <a:rPr lang="en-US" sz="1300" dirty="0">
+                <a:solidFill>
+                  <a:srgbClr val="14213D"/>
+                </a:solidFill>
+                <a:latin typeface="IBM Plex Sans" pitchFamily="34" charset="0"/>
+                <a:ea typeface="IBM Plex Sans" pitchFamily="34" charset="-122"/>
+                <a:cs typeface="IBM Plex Sans" pitchFamily="34" charset="-120"/>
+              </a:rPr>
+              <a:t>Vývoj: console. Provoz: smtp.</a:t>
+            </a:r>
+            <a:endParaRPr lang="en-US" sz="1300" dirty="0"/>
+          </a:p>
+        </p:txBody>
+      </p:sp>
+      <p:sp>
+        <p:nvSpPr>
+          <p:cNvPr id="10" name="Text 8"/>
+          <p:cNvSpPr/>
+          <p:nvPr/>
+        </p:nvSpPr>
+        <p:spPr>
+          <a:xfrm>
+            <a:off x="3672840" y="2278382"/>
+            <a:ext cx="2234235" cy="939800"/>
+          </a:xfrm>
+          <a:prstGeom prst="rect">
+            <a:avLst/>
+          </a:prstGeom>
+          <a:noFill/>
+          <a:ln/>
+        </p:spPr>
+        <p:txBody>
+          <a:bodyPr wrap="square" lIns="0" tIns="0" rIns="0" bIns="0" rtlCol="0" anchor="t">
+            <a:normAutofit/>
+          </a:bodyPr>
+          <a:lstStyle/>
+          <a:p>
+            <a:pPr algn="l" marL="342900" indent="-342900">
+              <a:lnSpc>
+                <a:spcPts val="1800"/>
+              </a:lnSpc>
+              <a:buSzPct val="100000"/>
+              <a:buChar char="•"/>
+            </a:pPr>
+            <a:r>
+              <a:rPr lang="en-US" sz="1200" dirty="0">
+                <a:solidFill>
+                  <a:srgbClr val="14213D"/>
+                </a:solidFill>
+                <a:latin typeface="JetBrains Mono" pitchFamily="34" charset="0"/>
+                <a:ea typeface="JetBrains Mono" pitchFamily="34" charset="-122"/>
+                <a:cs typeface="JetBrains Mono" pitchFamily="34" charset="-120"/>
+              </a:rPr>
+              <a:t>Resend</a:t>
+            </a:r>
+            <a:endParaRPr lang="en-US" sz="1200" dirty="0"/>
+          </a:p>
+          <a:p>
+            <a:pPr algn="l" marL="342900" indent="-342900">
+              <a:lnSpc>
+                <a:spcPts val="1800"/>
+              </a:lnSpc>
+              <a:buSzPct val="100000"/>
+              <a:buChar char="•"/>
+            </a:pPr>
+            <a:r>
+              <a:rPr lang="en-US" sz="1200" dirty="0">
+                <a:solidFill>
+                  <a:srgbClr val="14213D"/>
+                </a:solidFill>
+                <a:latin typeface="JetBrains Mono" pitchFamily="34" charset="0"/>
+                <a:ea typeface="JetBrains Mono" pitchFamily="34" charset="-122"/>
+                <a:cs typeface="JetBrains Mono" pitchFamily="34" charset="-120"/>
+              </a:rPr>
+              <a:t>Seznam, Gmail</a:t>
+            </a:r>
+            <a:endParaRPr lang="en-US" sz="1200" dirty="0"/>
+          </a:p>
+          <a:p>
+            <a:pPr algn="l" marL="342900" indent="-342900">
+              <a:lnSpc>
+                <a:spcPts val="1800"/>
+              </a:lnSpc>
+              <a:buSzPct val="100000"/>
+              <a:buChar char="•"/>
+            </a:pPr>
+            <a:r>
+              <a:rPr lang="en-US" sz="1200" dirty="0">
+                <a:solidFill>
+                  <a:srgbClr val="14213D"/>
+                </a:solidFill>
+                <a:latin typeface="JetBrains Mono" pitchFamily="34" charset="0"/>
+                <a:ea typeface="JetBrains Mono" pitchFamily="34" charset="-122"/>
+                <a:cs typeface="JetBrains Mono" pitchFamily="34" charset="-120"/>
+              </a:rPr>
+              <a:t>Brevo, Mailgun</a:t>
+            </a:r>
+            <a:endParaRPr lang="en-US" sz="1200" dirty="0"/>
+          </a:p>
+          <a:p>
+            <a:pPr algn="l" marL="342900" indent="-342900">
+              <a:lnSpc>
+                <a:spcPts val="1800"/>
+              </a:lnSpc>
+              <a:buSzPct val="100000"/>
+              <a:buChar char="•"/>
+            </a:pPr>
+            <a:r>
+              <a:rPr lang="en-US" sz="1200" dirty="0">
+                <a:solidFill>
+                  <a:srgbClr val="14213D"/>
+                </a:solidFill>
+                <a:latin typeface="JetBrains Mono" pitchFamily="34" charset="0"/>
+                <a:ea typeface="JetBrains Mono" pitchFamily="34" charset="-122"/>
+                <a:cs typeface="JetBrains Mono" pitchFamily="34" charset="-120"/>
+              </a:rPr>
+              <a:t>send_test_email.py</a:t>
+            </a:r>
+            <a:endParaRPr lang="en-US" sz="1200" dirty="0"/>
+          </a:p>
+        </p:txBody>
+      </p:sp>
+      <p:sp>
+        <p:nvSpPr>
+          <p:cNvPr id="11" name="Shape 9"/>
+          <p:cNvSpPr/>
+          <p:nvPr/>
+        </p:nvSpPr>
+        <p:spPr>
+          <a:xfrm>
+            <a:off x="6177280" y="1483361"/>
+            <a:ext cx="2524760" cy="2341880"/>
+          </a:xfrm>
+          <a:prstGeom prst="roundRect">
+            <a:avLst>
+              <a:gd name="adj" fmla="val 5423"/>
+            </a:avLst>
+          </a:prstGeom>
+          <a:solidFill>
+            <a:srgbClr val="E4E7EE"/>
+          </a:solidFill>
+          <a:ln/>
+        </p:spPr>
+      </p:sp>
+      <p:sp>
+        <p:nvSpPr>
+          <p:cNvPr id="12" name="Text 10"/>
+          <p:cNvSpPr/>
+          <p:nvPr/>
+        </p:nvSpPr>
+        <p:spPr>
+          <a:xfrm>
+            <a:off x="6355080" y="1661161"/>
+            <a:ext cx="2234235" cy="254000"/>
+          </a:xfrm>
+          <a:prstGeom prst="rect">
+            <a:avLst/>
+          </a:prstGeom>
+          <a:noFill/>
+          <a:ln/>
+        </p:spPr>
+        <p:txBody>
+          <a:bodyPr wrap="square" lIns="0" tIns="0" rIns="0" bIns="0" rtlCol="0" anchor="t">
+            <a:normAutofit/>
+          </a:bodyPr>
+          <a:lstStyle/>
+          <a:p>
+            <a:pPr algn="l" indent="0" marL="0">
+              <a:lnSpc>
+                <a:spcPts val="1800"/>
+              </a:lnSpc>
+              <a:buNone/>
+            </a:pPr>
+            <a:r>
+              <a:rPr lang="en-US" sz="1500" b="1" dirty="0">
+                <a:solidFill>
+                  <a:srgbClr val="14213D"/>
+                </a:solidFill>
+                <a:latin typeface="JetBrains Mono" pitchFamily="34" charset="0"/>
+                <a:ea typeface="JetBrains Mono" pitchFamily="34" charset="-122"/>
+                <a:cs typeface="JetBrains Mono" pitchFamily="34" charset="-120"/>
+              </a:rPr>
+              <a:t>Administrace</a:t>
+            </a:r>
+            <a:endParaRPr lang="en-US" sz="1500" dirty="0"/>
+          </a:p>
+        </p:txBody>
+      </p:sp>
+      <p:sp>
+        <p:nvSpPr>
+          <p:cNvPr id="13" name="Text 11"/>
+          <p:cNvSpPr/>
+          <p:nvPr/>
+        </p:nvSpPr>
+        <p:spPr>
+          <a:xfrm>
+            <a:off x="6355080" y="1965961"/>
+            <a:ext cx="2234235" cy="256540"/>
+          </a:xfrm>
+          <a:prstGeom prst="rect">
+            <a:avLst/>
+          </a:prstGeom>
+          <a:noFill/>
+          <a:ln/>
+        </p:spPr>
+        <p:txBody>
+          <a:bodyPr wrap="square" lIns="0" tIns="0" rIns="0" bIns="0" rtlCol="0" anchor="t">
+            <a:normAutofit/>
+          </a:bodyPr>
+          <a:lstStyle/>
+          <a:p>
+            <a:pPr algn="l" indent="0" marL="0">
+              <a:lnSpc>
+                <a:spcPts val="1820"/>
+              </a:lnSpc>
+              <a:buNone/>
+            </a:pPr>
+            <a:r>
+              <a:rPr lang="en-US" sz="1300" dirty="0">
+                <a:solidFill>
+                  <a:srgbClr val="14213D"/>
+                </a:solidFill>
+                <a:latin typeface="IBM Plex Sans" pitchFamily="34" charset="0"/>
+                <a:ea typeface="IBM Plex Sans" pitchFamily="34" charset="-122"/>
+                <a:cs typeface="IBM Plex Sans" pitchFamily="34" charset="-120"/>
+              </a:rPr>
+              <a:t>Grant-only, nikdy neodebírá</a:t>
+            </a:r>
+            <a:endParaRPr lang="en-US" sz="1300" dirty="0"/>
+          </a:p>
+        </p:txBody>
+      </p:sp>
+      <p:sp>
+        <p:nvSpPr>
+          <p:cNvPr id="14" name="Text 12"/>
+          <p:cNvSpPr/>
+          <p:nvPr/>
+        </p:nvSpPr>
+        <p:spPr>
+          <a:xfrm>
+            <a:off x="6355080" y="2273300"/>
+            <a:ext cx="2234235" cy="711200"/>
+          </a:xfrm>
+          <a:prstGeom prst="rect">
+            <a:avLst/>
+          </a:prstGeom>
+          <a:noFill/>
+          <a:ln/>
+        </p:spPr>
+        <p:txBody>
+          <a:bodyPr wrap="square" lIns="0" tIns="0" rIns="0" bIns="0" rtlCol="0" anchor="t">
+            <a:normAutofit/>
+          </a:bodyPr>
+          <a:lstStyle/>
+          <a:p>
+            <a:pPr algn="l" marL="342900" indent="-342900">
+              <a:lnSpc>
+                <a:spcPts val="1800"/>
+              </a:lnSpc>
+              <a:buSzPct val="100000"/>
+              <a:buChar char="•"/>
+            </a:pPr>
+            <a:r>
+              <a:rPr lang="en-US" sz="1200" dirty="0">
+                <a:solidFill>
+                  <a:srgbClr val="14213D"/>
+                </a:solidFill>
+                <a:latin typeface="JetBrains Mono" pitchFamily="34" charset="0"/>
+                <a:ea typeface="JetBrains Mono" pitchFamily="34" charset="-122"/>
+                <a:cs typeface="JetBrains Mono" pitchFamily="34" charset="-120"/>
+              </a:rPr>
+              <a:t>ADMIN_EMAILS</a:t>
+            </a:r>
+            <a:endParaRPr lang="en-US" sz="1200" dirty="0"/>
+          </a:p>
+          <a:p>
+            <a:pPr algn="l" marL="342900" indent="-342900">
+              <a:lnSpc>
+                <a:spcPts val="1800"/>
+              </a:lnSpc>
+              <a:buSzPct val="100000"/>
+              <a:buChar char="•"/>
+            </a:pPr>
+            <a:r>
+              <a:rPr lang="en-US" sz="1200" dirty="0">
+                <a:solidFill>
+                  <a:srgbClr val="14213D"/>
+                </a:solidFill>
+                <a:latin typeface="JetBrains Mono" pitchFamily="34" charset="0"/>
+                <a:ea typeface="JetBrains Mono" pitchFamily="34" charset="-122"/>
+                <a:cs typeface="JetBrains Mono" pitchFamily="34" charset="-120"/>
+              </a:rPr>
+              <a:t>/admin konzole</a:t>
+            </a:r>
+            <a:endParaRPr lang="en-US" sz="1200" dirty="0"/>
+          </a:p>
+          <a:p>
+            <a:pPr algn="l" marL="342900" indent="-342900">
+              <a:lnSpc>
+                <a:spcPts val="1800"/>
+              </a:lnSpc>
+              <a:buSzPct val="100000"/>
+              <a:buChar char="•"/>
+            </a:pPr>
+            <a:r>
+              <a:rPr lang="en-US" sz="1200" dirty="0">
+                <a:solidFill>
+                  <a:srgbClr val="14213D"/>
+                </a:solidFill>
+                <a:latin typeface="JetBrains Mono" pitchFamily="34" charset="0"/>
+                <a:ea typeface="JetBrains Mono" pitchFamily="34" charset="-122"/>
+                <a:cs typeface="JetBrains Mono" pitchFamily="34" charset="-120"/>
+              </a:rPr>
+              <a:t>is_admin v DB</a:t>
+            </a:r>
+            <a:endParaRPr lang="en-US" sz="1200" dirty="0"/>
+          </a:p>
+        </p:txBody>
+      </p:sp>
+      <p:sp>
+        <p:nvSpPr>
+          <p:cNvPr id="15" name="Shape 13"/>
+          <p:cNvSpPr/>
+          <p:nvPr/>
+        </p:nvSpPr>
+        <p:spPr>
+          <a:xfrm>
+            <a:off x="8854440" y="1483361"/>
+            <a:ext cx="2524760" cy="2341880"/>
+          </a:xfrm>
+          <a:prstGeom prst="roundRect">
+            <a:avLst>
+              <a:gd name="adj" fmla="val 5423"/>
+            </a:avLst>
+          </a:prstGeom>
+          <a:solidFill>
+            <a:srgbClr val="F6E7C1"/>
+          </a:solidFill>
+          <a:ln/>
+        </p:spPr>
+      </p:sp>
+      <p:sp>
+        <p:nvSpPr>
+          <p:cNvPr id="16" name="Text 14"/>
+          <p:cNvSpPr/>
+          <p:nvPr/>
+        </p:nvSpPr>
+        <p:spPr>
+          <a:xfrm>
+            <a:off x="9032240" y="1661161"/>
+            <a:ext cx="2234235" cy="254000"/>
+          </a:xfrm>
+          <a:prstGeom prst="rect">
+            <a:avLst/>
+          </a:prstGeom>
+          <a:noFill/>
+          <a:ln/>
+        </p:spPr>
+        <p:txBody>
+          <a:bodyPr wrap="square" lIns="0" tIns="0" rIns="0" bIns="0" rtlCol="0" anchor="t">
+            <a:normAutofit/>
+          </a:bodyPr>
+          <a:lstStyle/>
+          <a:p>
+            <a:pPr algn="l" indent="0" marL="0">
+              <a:lnSpc>
+                <a:spcPts val="1800"/>
+              </a:lnSpc>
+              <a:buNone/>
+            </a:pPr>
+            <a:r>
+              <a:rPr lang="en-US" sz="1500" b="1" dirty="0">
+                <a:solidFill>
+                  <a:srgbClr val="14213D"/>
+                </a:solidFill>
+                <a:latin typeface="JetBrains Mono" pitchFamily="34" charset="0"/>
+                <a:ea typeface="JetBrains Mono" pitchFamily="34" charset="-122"/>
+                <a:cs typeface="JetBrains Mono" pitchFamily="34" charset="-120"/>
+              </a:rPr>
+              <a:t>Zabezpečení</a:t>
+            </a:r>
+            <a:endParaRPr lang="en-US" sz="1500" dirty="0"/>
+          </a:p>
+        </p:txBody>
+      </p:sp>
+      <p:sp>
+        <p:nvSpPr>
+          <p:cNvPr id="17" name="Text 15"/>
+          <p:cNvSpPr/>
+          <p:nvPr/>
+        </p:nvSpPr>
+        <p:spPr>
+          <a:xfrm>
+            <a:off x="9032240" y="1965961"/>
+            <a:ext cx="2234235" cy="487680"/>
+          </a:xfrm>
+          <a:prstGeom prst="rect">
+            <a:avLst/>
+          </a:prstGeom>
+          <a:noFill/>
+          <a:ln/>
+        </p:spPr>
+        <p:txBody>
+          <a:bodyPr wrap="square" lIns="0" tIns="0" rIns="0" bIns="0" rtlCol="0" anchor="t">
+            <a:normAutofit/>
+          </a:bodyPr>
+          <a:lstStyle/>
+          <a:p>
+            <a:pPr algn="l" indent="0" marL="0">
+              <a:lnSpc>
+                <a:spcPts val="1820"/>
+              </a:lnSpc>
+              <a:buNone/>
+            </a:pPr>
+            <a:r>
+              <a:rPr lang="en-US" sz="1300" dirty="0">
+                <a:solidFill>
+                  <a:srgbClr val="14213D"/>
+                </a:solidFill>
+                <a:latin typeface="IBM Plex Sans" pitchFamily="34" charset="0"/>
+                <a:ea typeface="IBM Plex Sans" pitchFamily="34" charset="-122"/>
+                <a:cs typeface="IBM Plex Sans" pitchFamily="34" charset="-120"/>
+              </a:rPr>
+              <a:t>V databázi jen hash kódu</a:t>
+            </a:r>
+            <a:endParaRPr lang="en-US" sz="1300" dirty="0"/>
+          </a:p>
+        </p:txBody>
+      </p:sp>
+      <p:sp>
+        <p:nvSpPr>
+          <p:cNvPr id="18" name="Text 16"/>
+          <p:cNvSpPr/>
+          <p:nvPr/>
+        </p:nvSpPr>
+        <p:spPr>
+          <a:xfrm>
+            <a:off x="9032240" y="2504439"/>
+            <a:ext cx="2234235" cy="1168400"/>
+          </a:xfrm>
+          <a:prstGeom prst="rect">
+            <a:avLst/>
+          </a:prstGeom>
+          <a:noFill/>
+          <a:ln/>
+        </p:spPr>
+        <p:txBody>
+          <a:bodyPr wrap="square" lIns="0" tIns="0" rIns="0" bIns="0" rtlCol="0" anchor="t">
+            <a:normAutofit/>
+          </a:bodyPr>
+          <a:lstStyle/>
+          <a:p>
+            <a:pPr algn="l" marL="342900" indent="-342900">
+              <a:lnSpc>
+                <a:spcPts val="1800"/>
+              </a:lnSpc>
+              <a:buSzPct val="100000"/>
+              <a:buChar char="•"/>
+            </a:pPr>
+            <a:r>
+              <a:rPr lang="en-US" sz="1200" dirty="0">
+                <a:solidFill>
+                  <a:srgbClr val="14213D"/>
+                </a:solidFill>
+                <a:latin typeface="JetBrains Mono" pitchFamily="34" charset="0"/>
+                <a:ea typeface="JetBrains Mono" pitchFamily="34" charset="-122"/>
+                <a:cs typeface="JetBrains Mono" pitchFamily="34" charset="-120"/>
+              </a:rPr>
+              <a:t>HMAC hash</a:t>
+            </a:r>
+            <a:endParaRPr lang="en-US" sz="1200" dirty="0"/>
+          </a:p>
+          <a:p>
+            <a:pPr algn="l" marL="342900" indent="-342900">
+              <a:lnSpc>
+                <a:spcPts val="1800"/>
+              </a:lnSpc>
+              <a:buSzPct val="100000"/>
+              <a:buChar char="•"/>
+            </a:pPr>
+            <a:r>
+              <a:rPr lang="en-US" sz="1200" dirty="0">
+                <a:solidFill>
+                  <a:srgbClr val="14213D"/>
+                </a:solidFill>
+                <a:latin typeface="JetBrains Mono" pitchFamily="34" charset="0"/>
+                <a:ea typeface="JetBrains Mono" pitchFamily="34" charset="-122"/>
+                <a:cs typeface="JetBrains Mono" pitchFamily="34" charset="-120"/>
+              </a:rPr>
+              <a:t>jednorázový</a:t>
+            </a:r>
+            <a:endParaRPr lang="en-US" sz="1200" dirty="0"/>
+          </a:p>
+          <a:p>
+            <a:pPr algn="l" marL="342900" indent="-342900">
+              <a:lnSpc>
+                <a:spcPts val="1800"/>
+              </a:lnSpc>
+              <a:buSzPct val="100000"/>
+              <a:buChar char="•"/>
+            </a:pPr>
+            <a:r>
+              <a:rPr lang="en-US" sz="1200" dirty="0">
+                <a:solidFill>
+                  <a:srgbClr val="14213D"/>
+                </a:solidFill>
+                <a:latin typeface="JetBrains Mono" pitchFamily="34" charset="0"/>
+                <a:ea typeface="JetBrains Mono" pitchFamily="34" charset="-122"/>
+                <a:cs typeface="JetBrains Mono" pitchFamily="34" charset="-120"/>
+              </a:rPr>
+              <a:t>rate limit</a:t>
+            </a:r>
+            <a:endParaRPr lang="en-US" sz="1200" dirty="0"/>
+          </a:p>
+          <a:p>
+            <a:pPr algn="l" marL="342900" indent="-342900">
+              <a:lnSpc>
+                <a:spcPts val="1800"/>
+              </a:lnSpc>
+              <a:buSzPct val="100000"/>
+              <a:buChar char="•"/>
+            </a:pPr>
+            <a:r>
+              <a:rPr lang="en-US" sz="1200" dirty="0">
+                <a:solidFill>
+                  <a:srgbClr val="14213D"/>
+                </a:solidFill>
+                <a:latin typeface="JetBrains Mono" pitchFamily="34" charset="0"/>
+                <a:ea typeface="JetBrains Mono" pitchFamily="34" charset="-122"/>
+                <a:cs typeface="JetBrains Mono" pitchFamily="34" charset="-120"/>
+              </a:rPr>
+              <a:t>session 30 dní</a:t>
+            </a:r>
+            <a:endParaRPr lang="en-US" sz="1200" dirty="0"/>
+          </a:p>
+        </p:txBody>
+      </p:sp>
+      <p:sp>
+        <p:nvSpPr>
+          <p:cNvPr id="19" name="Text 17"/>
+          <p:cNvSpPr/>
+          <p:nvPr/>
+        </p:nvSpPr>
+        <p:spPr>
+          <a:xfrm>
+            <a:off x="812800" y="4028439"/>
+            <a:ext cx="10883392" cy="309880"/>
+          </a:xfrm>
+          <a:prstGeom prst="rect">
+            <a:avLst/>
+          </a:prstGeom>
+          <a:noFill/>
+          <a:ln/>
+        </p:spPr>
+        <p:txBody>
+          <a:bodyPr wrap="square" lIns="0" tIns="0" rIns="0" bIns="0" rtlCol="0" anchor="t">
+            <a:normAutofit/>
+          </a:bodyPr>
+          <a:lstStyle/>
+          <a:p>
+            <a:pPr algn="l" indent="0" marL="0">
+              <a:lnSpc>
+                <a:spcPts val="2240"/>
+              </a:lnSpc>
+              <a:buNone/>
+            </a:pPr>
+            <a:r>
+              <a:rPr lang="en-US" sz="1600" b="1" dirty="0">
+                <a:solidFill>
+                  <a:srgbClr val="0B7A6E"/>
+                </a:solidFill>
+                <a:latin typeface="IBM Plex Sans" pitchFamily="34" charset="0"/>
+                <a:ea typeface="IBM Plex Sans" pitchFamily="34" charset="-122"/>
+                <a:cs typeface="IBM Plex Sans" pitchFamily="34" charset="-120"/>
+              </a:rPr>
+              <a:t>Přihlášení gatuje jen UI – REST /api/* zůstává bez autentizace.</a:t>
+            </a:r>
+            <a:endParaRPr lang="en-US" sz="1600" dirty="0"/>
+          </a:p>
+        </p:txBody>
+      </p:sp>
+      <p:sp>
+        <p:nvSpPr>
+          <p:cNvPr id="20" name="Text 18"/>
+          <p:cNvSpPr/>
+          <p:nvPr/>
+        </p:nvSpPr>
+        <p:spPr>
+          <a:xfrm>
+            <a:off x="495808" y="6238239"/>
+            <a:ext cx="10883392" cy="238760"/>
+          </a:xfrm>
+          <a:prstGeom prst="rect">
+            <a:avLst/>
+          </a:prstGeom>
+          <a:noFill/>
+          <a:ln/>
+        </p:spPr>
+        <p:txBody>
+          <a:bodyPr wrap="square" lIns="0" tIns="0" rIns="0" bIns="0" rtlCol="0" anchor="t">
+            <a:normAutofit/>
+          </a:bodyPr>
+          <a:lstStyle/>
+          <a:p>
+            <a:pPr algn="r" indent="0" marL="0">
+              <a:lnSpc>
+                <a:spcPts val="1680"/>
+              </a:lnSpc>
+              <a:buNone/>
+            </a:pPr>
+            <a:r>
+              <a:rPr lang="en-US" sz="1200" dirty="0">
+                <a:solidFill>
+                  <a:srgbClr val="56607A"/>
+                </a:solidFill>
+                <a:latin typeface="IBM Plex Sans" pitchFamily="34" charset="0"/>
+                <a:ea typeface="IBM Plex Sans" pitchFamily="34" charset="-122"/>
+                <a:cs typeface="IBM Plex Sans" pitchFamily="34" charset="-120"/>
+              </a:rPr>
               <a:t>DriveWise AI · Architektura · 11</a:t>
+            </a:r>
+            <a:endParaRPr lang="en-US" sz="1200" dirty="0"/>
+          </a:p>
+        </p:txBody>
+      </p:sp>
+    </p:spTree>
+  </p:cSld>
+  <p:clrMapOvr>
+    <a:masterClrMapping/>
+  </p:clrMapOvr>
+</p:sld>
+</file>
+
+<file path=ppt/slides/slide13.xml><?xml version="1.0" encoding="utf-8"?>
+<p:sld xmlns:a="http://schemas.openxmlformats.org/drawingml/2006/main" xmlns:r="http://schemas.openxmlformats.org/officeDocument/2006/relationships" xmlns:p="http://schemas.openxmlformats.org/presentationml/2006/main">
+  <p:cSld name="Slide 12">
+    <p:bg>
+      <p:bgPr>
+        <a:solidFill>
+          <a:srgbClr val="F6F5F0"/>
+        </a:solidFill>
+      </p:bgPr>
+    </p:bg>
+    <p:spTree>
+      <p:nvGrpSpPr>
+        <p:cNvPr id="1" name=""/>
+        <p:cNvGrpSpPr/>
+        <p:nvPr/>
+      </p:nvGrpSpPr>
+      <p:grpSpPr>
+        <a:xfrm>
+          <a:off x="0" y="0"/>
+          <a:ext cx="0" cy="0"/>
+          <a:chOff x="0" y="0"/>
+          <a:chExt cx="0" cy="0"/>
+        </a:xfrm>
+      </p:grpSpPr>
+      <p:sp>
+        <p:nvSpPr>
+          <p:cNvPr id="2" name="Text 0"/>
+          <p:cNvSpPr/>
+          <p:nvPr/>
+        </p:nvSpPr>
+        <p:spPr>
+          <a:xfrm>
+            <a:off x="812800" y="812800"/>
+            <a:ext cx="10883392" cy="492760"/>
+          </a:xfrm>
+          <a:prstGeom prst="rect">
+            <a:avLst/>
+          </a:prstGeom>
+          <a:noFill/>
+          <a:ln/>
+        </p:spPr>
+        <p:txBody>
+          <a:bodyPr wrap="square" lIns="0" tIns="0" rIns="0" bIns="0" rtlCol="0" anchor="t">
+            <a:normAutofit/>
+          </a:bodyPr>
+          <a:lstStyle/>
+          <a:p>
+            <a:pPr algn="l" indent="0" marL="0">
+              <a:lnSpc>
+                <a:spcPts val="3680"/>
+              </a:lnSpc>
+              <a:buNone/>
+            </a:pPr>
+            <a:r>
+              <a:rPr lang="en-US" sz="3200" b="1" dirty="0">
+                <a:solidFill>
+                  <a:srgbClr val="14213D"/>
+                </a:solidFill>
+                <a:latin typeface="IBM Plex Sans" pitchFamily="34" charset="0"/>
+                <a:ea typeface="IBM Plex Sans" pitchFamily="34" charset="-122"/>
+                <a:cs typeface="IBM Plex Sans" pitchFamily="34" charset="-120"/>
+              </a:rPr>
+              <a:t>Pamatování požadavků mezi relacemi</a:t>
+            </a:r>
+            <a:endParaRPr lang="en-US" sz="3200" dirty="0"/>
+          </a:p>
+        </p:txBody>
+      </p:sp>
+      <p:sp>
+        <p:nvSpPr>
+          <p:cNvPr id="3" name="Shape 1"/>
+          <p:cNvSpPr/>
+          <p:nvPr/>
+        </p:nvSpPr>
+        <p:spPr>
+          <a:xfrm>
+            <a:off x="812800" y="1483361"/>
+            <a:ext cx="1991360" cy="1874520"/>
+          </a:xfrm>
+          <a:prstGeom prst="roundRect">
+            <a:avLst>
+              <a:gd name="adj" fmla="val 6775"/>
+            </a:avLst>
+          </a:prstGeom>
+          <a:solidFill>
+            <a:srgbClr val="D8EBE7"/>
+          </a:solidFill>
+          <a:ln/>
+        </p:spPr>
+      </p:sp>
+      <p:sp>
+        <p:nvSpPr>
+          <p:cNvPr id="4" name="Text 2"/>
+          <p:cNvSpPr/>
+          <p:nvPr/>
+        </p:nvSpPr>
+        <p:spPr>
+          <a:xfrm>
+            <a:off x="990600" y="1661161"/>
+            <a:ext cx="1686560" cy="238760"/>
+          </a:xfrm>
+          <a:prstGeom prst="rect">
+            <a:avLst/>
+          </a:prstGeom>
+          <a:noFill/>
+          <a:ln/>
+        </p:spPr>
+        <p:txBody>
+          <a:bodyPr wrap="square" lIns="0" tIns="0" rIns="0" bIns="0" rtlCol="0" anchor="t">
+            <a:normAutofit/>
+          </a:bodyPr>
+          <a:lstStyle/>
+          <a:p>
+            <a:pPr algn="l" indent="0" marL="0">
+              <a:lnSpc>
+                <a:spcPts val="1680"/>
+              </a:lnSpc>
+              <a:buNone/>
+            </a:pPr>
+            <a:r>
+              <a:rPr lang="en-US" sz="1200" b="1" dirty="0">
+                <a:solidFill>
+                  <a:srgbClr val="0B7A6E"/>
+                </a:solidFill>
+                <a:latin typeface="IBM Plex Sans" pitchFamily="34" charset="0"/>
+                <a:ea typeface="IBM Plex Sans" pitchFamily="34" charset="-122"/>
+                <a:cs typeface="IBM Plex Sans" pitchFamily="34" charset="-120"/>
+              </a:rPr>
+              <a:t>01</a:t>
+            </a:r>
+            <a:endParaRPr lang="en-US" sz="1200" dirty="0"/>
+          </a:p>
+        </p:txBody>
+      </p:sp>
+      <p:sp>
+        <p:nvSpPr>
+          <p:cNvPr id="5" name="Text 3"/>
+          <p:cNvSpPr/>
+          <p:nvPr/>
+        </p:nvSpPr>
+        <p:spPr>
+          <a:xfrm>
+            <a:off x="990600" y="1950721"/>
+            <a:ext cx="1686560" cy="254000"/>
+          </a:xfrm>
+          <a:prstGeom prst="rect">
+            <a:avLst/>
+          </a:prstGeom>
+          <a:noFill/>
+          <a:ln/>
+        </p:spPr>
+        <p:txBody>
+          <a:bodyPr wrap="square" lIns="0" tIns="0" rIns="0" bIns="0" rtlCol="0" anchor="t">
+            <a:normAutofit/>
+          </a:bodyPr>
+          <a:lstStyle/>
+          <a:p>
+            <a:pPr algn="l" indent="0" marL="0">
+              <a:lnSpc>
+                <a:spcPts val="1800"/>
+              </a:lnSpc>
+              <a:buNone/>
+            </a:pPr>
+            <a:r>
+              <a:rPr lang="en-US" sz="1500" b="1" dirty="0">
+                <a:solidFill>
+                  <a:srgbClr val="14213D"/>
+                </a:solidFill>
+                <a:latin typeface="IBM Plex Sans" pitchFamily="34" charset="0"/>
+                <a:ea typeface="IBM Plex Sans" pitchFamily="34" charset="-122"/>
+                <a:cs typeface="IBM Plex Sans" pitchFamily="34" charset="-120"/>
+              </a:rPr>
+              <a:t>Přihlášení</a:t>
+            </a:r>
+            <a:endParaRPr lang="en-US" sz="1500" dirty="0"/>
+          </a:p>
+        </p:txBody>
+      </p:sp>
+      <p:sp>
+        <p:nvSpPr>
+          <p:cNvPr id="6" name="Text 4"/>
+          <p:cNvSpPr/>
+          <p:nvPr/>
+        </p:nvSpPr>
+        <p:spPr>
+          <a:xfrm>
+            <a:off x="990600" y="2255521"/>
+            <a:ext cx="1686560" cy="949960"/>
+          </a:xfrm>
+          <a:prstGeom prst="rect">
+            <a:avLst/>
+          </a:prstGeom>
+          <a:noFill/>
+          <a:ln/>
+        </p:spPr>
+        <p:txBody>
+          <a:bodyPr wrap="square" lIns="0" tIns="0" rIns="0" bIns="0" rtlCol="0" anchor="t">
+            <a:normAutofit/>
+          </a:bodyPr>
+          <a:lstStyle/>
+          <a:p>
+            <a:pPr algn="l" indent="0" marL="0">
+              <a:lnSpc>
+                <a:spcPts val="1820"/>
+              </a:lnSpc>
+              <a:buNone/>
+            </a:pPr>
+            <a:r>
+              <a:rPr lang="en-US" sz="1300" dirty="0">
+                <a:solidFill>
+                  <a:srgbClr val="14213D"/>
+                </a:solidFill>
+                <a:latin typeface="IBM Plex Sans" pitchFamily="34" charset="0"/>
+                <a:ea typeface="IBM Plex Sans" pitchFamily="34" charset="-122"/>
+                <a:cs typeface="IBM Plex Sans" pitchFamily="34" charset="-120"/>
+              </a:rPr>
+              <a:t>E-mail a jednorázový kód nahradí heslo i registraci.</a:t>
+            </a:r>
+            <a:endParaRPr lang="en-US" sz="1300" dirty="0"/>
+          </a:p>
+        </p:txBody>
+      </p:sp>
+      <p:sp>
+        <p:nvSpPr>
+          <p:cNvPr id="7" name="Shape 5"/>
+          <p:cNvSpPr/>
+          <p:nvPr/>
+        </p:nvSpPr>
+        <p:spPr>
+          <a:xfrm>
+            <a:off x="2956560" y="1483361"/>
+            <a:ext cx="1991360" cy="1874520"/>
+          </a:xfrm>
+          <a:prstGeom prst="roundRect">
+            <a:avLst>
+              <a:gd name="adj" fmla="val 6775"/>
+            </a:avLst>
+          </a:prstGeom>
+          <a:solidFill>
+            <a:srgbClr val="F6E7C1"/>
+          </a:solidFill>
+          <a:ln/>
+        </p:spPr>
+      </p:sp>
+      <p:sp>
+        <p:nvSpPr>
+          <p:cNvPr id="8" name="Text 6"/>
+          <p:cNvSpPr/>
+          <p:nvPr/>
+        </p:nvSpPr>
+        <p:spPr>
+          <a:xfrm>
+            <a:off x="3134360" y="1661161"/>
+            <a:ext cx="1686560" cy="238760"/>
+          </a:xfrm>
+          <a:prstGeom prst="rect">
+            <a:avLst/>
+          </a:prstGeom>
+          <a:noFill/>
+          <a:ln/>
+        </p:spPr>
+        <p:txBody>
+          <a:bodyPr wrap="square" lIns="0" tIns="0" rIns="0" bIns="0" rtlCol="0" anchor="t">
+            <a:normAutofit/>
+          </a:bodyPr>
+          <a:lstStyle/>
+          <a:p>
+            <a:pPr algn="l" indent="0" marL="0">
+              <a:lnSpc>
+                <a:spcPts val="1680"/>
+              </a:lnSpc>
+              <a:buNone/>
+            </a:pPr>
+            <a:r>
+              <a:rPr lang="en-US" sz="1200" b="1" dirty="0">
+                <a:solidFill>
+                  <a:srgbClr val="8A5A00"/>
+                </a:solidFill>
+                <a:latin typeface="IBM Plex Sans" pitchFamily="34" charset="0"/>
+                <a:ea typeface="IBM Plex Sans" pitchFamily="34" charset="-122"/>
+                <a:cs typeface="IBM Plex Sans" pitchFamily="34" charset="-120"/>
+              </a:rPr>
+              <a:t>02</a:t>
+            </a:r>
+            <a:endParaRPr lang="en-US" sz="1200" dirty="0"/>
+          </a:p>
+        </p:txBody>
+      </p:sp>
+      <p:sp>
+        <p:nvSpPr>
+          <p:cNvPr id="9" name="Text 7"/>
+          <p:cNvSpPr/>
+          <p:nvPr/>
+        </p:nvSpPr>
+        <p:spPr>
+          <a:xfrm>
+            <a:off x="3134360" y="1950721"/>
+            <a:ext cx="1686560" cy="254000"/>
+          </a:xfrm>
+          <a:prstGeom prst="rect">
+            <a:avLst/>
+          </a:prstGeom>
+          <a:noFill/>
+          <a:ln/>
+        </p:spPr>
+        <p:txBody>
+          <a:bodyPr wrap="square" lIns="0" tIns="0" rIns="0" bIns="0" rtlCol="0" anchor="t">
+            <a:normAutofit/>
+          </a:bodyPr>
+          <a:lstStyle/>
+          <a:p>
+            <a:pPr algn="l" indent="0" marL="0">
+              <a:lnSpc>
+                <a:spcPts val="1800"/>
+              </a:lnSpc>
+              <a:buNone/>
+            </a:pPr>
+            <a:r>
+              <a:rPr lang="en-US" sz="1500" b="1" dirty="0">
+                <a:solidFill>
+                  <a:srgbClr val="14213D"/>
+                </a:solidFill>
+                <a:latin typeface="IBM Plex Sans" pitchFamily="34" charset="0"/>
+                <a:ea typeface="IBM Plex Sans" pitchFamily="34" charset="-122"/>
+                <a:cs typeface="IBM Plex Sans" pitchFamily="34" charset="-120"/>
+              </a:rPr>
+              <a:t>Vyplnění</a:t>
+            </a:r>
+            <a:endParaRPr lang="en-US" sz="1500" dirty="0"/>
+          </a:p>
+        </p:txBody>
+      </p:sp>
+      <p:sp>
+        <p:nvSpPr>
+          <p:cNvPr id="10" name="Text 8"/>
+          <p:cNvSpPr/>
+          <p:nvPr/>
+        </p:nvSpPr>
+        <p:spPr>
+          <a:xfrm>
+            <a:off x="3134360" y="2255521"/>
+            <a:ext cx="1686560" cy="949960"/>
+          </a:xfrm>
+          <a:prstGeom prst="rect">
+            <a:avLst/>
+          </a:prstGeom>
+          <a:noFill/>
+          <a:ln/>
+        </p:spPr>
+        <p:txBody>
+          <a:bodyPr wrap="square" lIns="0" tIns="0" rIns="0" bIns="0" rtlCol="0" anchor="t">
+            <a:normAutofit/>
+          </a:bodyPr>
+          <a:lstStyle/>
+          <a:p>
+            <a:pPr algn="l" indent="0" marL="0">
+              <a:lnSpc>
+                <a:spcPts val="1820"/>
+              </a:lnSpc>
+              <a:buNone/>
+            </a:pPr>
+            <a:r>
+              <a:rPr lang="en-US" sz="1300" dirty="0">
+                <a:solidFill>
+                  <a:srgbClr val="14213D"/>
+                </a:solidFill>
+                <a:latin typeface="IBM Plex Sans" pitchFamily="34" charset="0"/>
+                <a:ea typeface="IBM Plex Sans" pitchFamily="34" charset="-122"/>
+                <a:cs typeface="IBM Plex Sans" pitchFamily="34" charset="-120"/>
+              </a:rPr>
+              <a:t>Průvodce nebo chat zjistí, jaké auto uživatel hledá.</a:t>
+            </a:r>
+            <a:endParaRPr lang="en-US" sz="1300" dirty="0"/>
+          </a:p>
+        </p:txBody>
+      </p:sp>
+      <p:sp>
+        <p:nvSpPr>
+          <p:cNvPr id="11" name="Shape 9"/>
+          <p:cNvSpPr/>
+          <p:nvPr/>
+        </p:nvSpPr>
+        <p:spPr>
+          <a:xfrm>
+            <a:off x="5100320" y="1483361"/>
+            <a:ext cx="1991360" cy="1874520"/>
+          </a:xfrm>
+          <a:prstGeom prst="roundRect">
+            <a:avLst>
+              <a:gd name="adj" fmla="val 6775"/>
+            </a:avLst>
+          </a:prstGeom>
+          <a:solidFill>
+            <a:srgbClr val="E4E7EE"/>
+          </a:solidFill>
+          <a:ln/>
+        </p:spPr>
+      </p:sp>
+      <p:sp>
+        <p:nvSpPr>
+          <p:cNvPr id="12" name="Text 10"/>
+          <p:cNvSpPr/>
+          <p:nvPr/>
+        </p:nvSpPr>
+        <p:spPr>
+          <a:xfrm>
+            <a:off x="5278120" y="1661161"/>
+            <a:ext cx="1686560" cy="238760"/>
+          </a:xfrm>
+          <a:prstGeom prst="rect">
+            <a:avLst/>
+          </a:prstGeom>
+          <a:noFill/>
+          <a:ln/>
+        </p:spPr>
+        <p:txBody>
+          <a:bodyPr wrap="square" lIns="0" tIns="0" rIns="0" bIns="0" rtlCol="0" anchor="t">
+            <a:normAutofit/>
+          </a:bodyPr>
+          <a:lstStyle/>
+          <a:p>
+            <a:pPr algn="l" indent="0" marL="0">
+              <a:lnSpc>
+                <a:spcPts val="1680"/>
+              </a:lnSpc>
+              <a:buNone/>
+            </a:pPr>
+            <a:r>
+              <a:rPr lang="en-US" sz="1200" b="1" dirty="0">
+                <a:solidFill>
+                  <a:srgbClr val="3A4665"/>
+                </a:solidFill>
+                <a:latin typeface="IBM Plex Sans" pitchFamily="34" charset="0"/>
+                <a:ea typeface="IBM Plex Sans" pitchFamily="34" charset="-122"/>
+                <a:cs typeface="IBM Plex Sans" pitchFamily="34" charset="-120"/>
+              </a:rPr>
+              <a:t>03</a:t>
+            </a:r>
+            <a:endParaRPr lang="en-US" sz="1200" dirty="0"/>
+          </a:p>
+        </p:txBody>
+      </p:sp>
+      <p:sp>
+        <p:nvSpPr>
+          <p:cNvPr id="13" name="Text 11"/>
+          <p:cNvSpPr/>
+          <p:nvPr/>
+        </p:nvSpPr>
+        <p:spPr>
+          <a:xfrm>
+            <a:off x="5278120" y="1950721"/>
+            <a:ext cx="1686560" cy="254000"/>
+          </a:xfrm>
+          <a:prstGeom prst="rect">
+            <a:avLst/>
+          </a:prstGeom>
+          <a:noFill/>
+          <a:ln/>
+        </p:spPr>
+        <p:txBody>
+          <a:bodyPr wrap="square" lIns="0" tIns="0" rIns="0" bIns="0" rtlCol="0" anchor="t">
+            <a:normAutofit/>
+          </a:bodyPr>
+          <a:lstStyle/>
+          <a:p>
+            <a:pPr algn="l" indent="0" marL="0">
+              <a:lnSpc>
+                <a:spcPts val="1800"/>
+              </a:lnSpc>
+              <a:buNone/>
+            </a:pPr>
+            <a:r>
+              <a:rPr lang="en-US" sz="1500" b="1" dirty="0">
+                <a:solidFill>
+                  <a:srgbClr val="14213D"/>
+                </a:solidFill>
+                <a:latin typeface="IBM Plex Sans" pitchFamily="34" charset="0"/>
+                <a:ea typeface="IBM Plex Sans" pitchFamily="34" charset="-122"/>
+                <a:cs typeface="IBM Plex Sans" pitchFamily="34" charset="-120"/>
+              </a:rPr>
+              <a:t>Uložení</a:t>
+            </a:r>
+            <a:endParaRPr lang="en-US" sz="1500" dirty="0"/>
+          </a:p>
+        </p:txBody>
+      </p:sp>
+      <p:sp>
+        <p:nvSpPr>
+          <p:cNvPr id="14" name="Text 12"/>
+          <p:cNvSpPr/>
+          <p:nvPr/>
+        </p:nvSpPr>
+        <p:spPr>
+          <a:xfrm>
+            <a:off x="5278120" y="2255521"/>
+            <a:ext cx="1686560" cy="949960"/>
+          </a:xfrm>
+          <a:prstGeom prst="rect">
+            <a:avLst/>
+          </a:prstGeom>
+          <a:noFill/>
+          <a:ln/>
+        </p:spPr>
+        <p:txBody>
+          <a:bodyPr wrap="square" lIns="0" tIns="0" rIns="0" bIns="0" rtlCol="0" anchor="t">
+            <a:normAutofit/>
+          </a:bodyPr>
+          <a:lstStyle/>
+          <a:p>
+            <a:pPr algn="l" indent="0" marL="0">
+              <a:lnSpc>
+                <a:spcPts val="1820"/>
+              </a:lnSpc>
+              <a:buNone/>
+            </a:pPr>
+            <a:r>
+              <a:rPr lang="en-US" sz="1300" dirty="0">
+                <a:solidFill>
+                  <a:srgbClr val="14213D"/>
+                </a:solidFill>
+                <a:latin typeface="IBM Plex Sans" pitchFamily="34" charset="0"/>
+                <a:ea typeface="IBM Plex Sans" pitchFamily="34" charset="-122"/>
+                <a:cs typeface="IBM Plex Sans" pitchFamily="34" charset="-120"/>
+              </a:rPr>
+              <a:t>Po každém kroku se snapshot uloží pod jeho účet.</a:t>
+            </a:r>
+            <a:endParaRPr lang="en-US" sz="1300" dirty="0"/>
+          </a:p>
+        </p:txBody>
+      </p:sp>
+      <p:sp>
+        <p:nvSpPr>
+          <p:cNvPr id="15" name="Shape 13"/>
+          <p:cNvSpPr/>
+          <p:nvPr/>
+        </p:nvSpPr>
+        <p:spPr>
+          <a:xfrm>
+            <a:off x="7244080" y="1483361"/>
+            <a:ext cx="1991360" cy="1874520"/>
+          </a:xfrm>
+          <a:prstGeom prst="roundRect">
+            <a:avLst>
+              <a:gd name="adj" fmla="val 6775"/>
+            </a:avLst>
+          </a:prstGeom>
+          <a:solidFill>
+            <a:srgbClr val="E4E7EE"/>
+          </a:solidFill>
+          <a:ln/>
+        </p:spPr>
+      </p:sp>
+      <p:sp>
+        <p:nvSpPr>
+          <p:cNvPr id="16" name="Text 14"/>
+          <p:cNvSpPr/>
+          <p:nvPr/>
+        </p:nvSpPr>
+        <p:spPr>
+          <a:xfrm>
+            <a:off x="7421880" y="1661161"/>
+            <a:ext cx="1686560" cy="238760"/>
+          </a:xfrm>
+          <a:prstGeom prst="rect">
+            <a:avLst/>
+          </a:prstGeom>
+          <a:noFill/>
+          <a:ln/>
+        </p:spPr>
+        <p:txBody>
+          <a:bodyPr wrap="square" lIns="0" tIns="0" rIns="0" bIns="0" rtlCol="0" anchor="t">
+            <a:normAutofit/>
+          </a:bodyPr>
+          <a:lstStyle/>
+          <a:p>
+            <a:pPr algn="l" indent="0" marL="0">
+              <a:lnSpc>
+                <a:spcPts val="1680"/>
+              </a:lnSpc>
+              <a:buNone/>
+            </a:pPr>
+            <a:r>
+              <a:rPr lang="en-US" sz="1200" b="1" dirty="0">
+                <a:solidFill>
+                  <a:srgbClr val="3A4665"/>
+                </a:solidFill>
+                <a:latin typeface="IBM Plex Sans" pitchFamily="34" charset="0"/>
+                <a:ea typeface="IBM Plex Sans" pitchFamily="34" charset="-122"/>
+                <a:cs typeface="IBM Plex Sans" pitchFamily="34" charset="-120"/>
+              </a:rPr>
+              <a:t>04</a:t>
+            </a:r>
+            <a:endParaRPr lang="en-US" sz="1200" dirty="0"/>
+          </a:p>
+        </p:txBody>
+      </p:sp>
+      <p:sp>
+        <p:nvSpPr>
+          <p:cNvPr id="17" name="Text 15"/>
+          <p:cNvSpPr/>
+          <p:nvPr/>
+        </p:nvSpPr>
+        <p:spPr>
+          <a:xfrm>
+            <a:off x="7421880" y="1950721"/>
+            <a:ext cx="1686560" cy="254000"/>
+          </a:xfrm>
+          <a:prstGeom prst="rect">
+            <a:avLst/>
+          </a:prstGeom>
+          <a:noFill/>
+          <a:ln/>
+        </p:spPr>
+        <p:txBody>
+          <a:bodyPr wrap="square" lIns="0" tIns="0" rIns="0" bIns="0" rtlCol="0" anchor="t">
+            <a:normAutofit/>
+          </a:bodyPr>
+          <a:lstStyle/>
+          <a:p>
+            <a:pPr algn="l" indent="0" marL="0">
+              <a:lnSpc>
+                <a:spcPts val="1800"/>
+              </a:lnSpc>
+              <a:buNone/>
+            </a:pPr>
+            <a:r>
+              <a:rPr lang="en-US" sz="1500" b="1" dirty="0">
+                <a:solidFill>
+                  <a:srgbClr val="14213D"/>
+                </a:solidFill>
+                <a:latin typeface="IBM Plex Sans" pitchFamily="34" charset="0"/>
+                <a:ea typeface="IBM Plex Sans" pitchFamily="34" charset="-122"/>
+                <a:cs typeface="IBM Plex Sans" pitchFamily="34" charset="-120"/>
+              </a:rPr>
+              <a:t>Reload</a:t>
+            </a:r>
+            <a:endParaRPr lang="en-US" sz="1500" dirty="0"/>
+          </a:p>
+        </p:txBody>
+      </p:sp>
+      <p:sp>
+        <p:nvSpPr>
+          <p:cNvPr id="18" name="Text 16"/>
+          <p:cNvSpPr/>
+          <p:nvPr/>
+        </p:nvSpPr>
+        <p:spPr>
+          <a:xfrm>
+            <a:off x="7421880" y="2255521"/>
+            <a:ext cx="1686560" cy="718820"/>
+          </a:xfrm>
+          <a:prstGeom prst="rect">
+            <a:avLst/>
+          </a:prstGeom>
+          <a:noFill/>
+          <a:ln/>
+        </p:spPr>
+        <p:txBody>
+          <a:bodyPr wrap="square" lIns="0" tIns="0" rIns="0" bIns="0" rtlCol="0" anchor="t">
+            <a:normAutofit/>
+          </a:bodyPr>
+          <a:lstStyle/>
+          <a:p>
+            <a:pPr algn="l" indent="0" marL="0">
+              <a:lnSpc>
+                <a:spcPts val="1820"/>
+              </a:lnSpc>
+              <a:buNone/>
+            </a:pPr>
+            <a:r>
+              <a:rPr lang="en-US" sz="1300" dirty="0">
+                <a:solidFill>
+                  <a:srgbClr val="14213D"/>
+                </a:solidFill>
+                <a:latin typeface="IBM Plex Sans" pitchFamily="34" charset="0"/>
+                <a:ea typeface="IBM Plex Sans" pitchFamily="34" charset="-122"/>
+                <a:cs typeface="IBM Plex Sans" pitchFamily="34" charset="-120"/>
+              </a:rPr>
+              <a:t>Relace v paměti zmizí, uložený snapshot v databázi zůstává.</a:t>
+            </a:r>
+            <a:endParaRPr lang="en-US" sz="1300" dirty="0"/>
+          </a:p>
+        </p:txBody>
+      </p:sp>
+      <p:sp>
+        <p:nvSpPr>
+          <p:cNvPr id="19" name="Shape 17"/>
+          <p:cNvSpPr/>
+          <p:nvPr/>
+        </p:nvSpPr>
+        <p:spPr>
+          <a:xfrm>
+            <a:off x="9387840" y="1483361"/>
+            <a:ext cx="1991360" cy="1874520"/>
+          </a:xfrm>
+          <a:prstGeom prst="roundRect">
+            <a:avLst>
+              <a:gd name="adj" fmla="val 6775"/>
+            </a:avLst>
+          </a:prstGeom>
+          <a:solidFill>
+            <a:srgbClr val="F6E7C1"/>
+          </a:solidFill>
+          <a:ln/>
+        </p:spPr>
+      </p:sp>
+      <p:sp>
+        <p:nvSpPr>
+          <p:cNvPr id="20" name="Text 18"/>
+          <p:cNvSpPr/>
+          <p:nvPr/>
+        </p:nvSpPr>
+        <p:spPr>
+          <a:xfrm>
+            <a:off x="9565640" y="1661161"/>
+            <a:ext cx="1686560" cy="238760"/>
+          </a:xfrm>
+          <a:prstGeom prst="rect">
+            <a:avLst/>
+          </a:prstGeom>
+          <a:noFill/>
+          <a:ln/>
+        </p:spPr>
+        <p:txBody>
+          <a:bodyPr wrap="square" lIns="0" tIns="0" rIns="0" bIns="0" rtlCol="0" anchor="t">
+            <a:normAutofit/>
+          </a:bodyPr>
+          <a:lstStyle/>
+          <a:p>
+            <a:pPr algn="l" indent="0" marL="0">
+              <a:lnSpc>
+                <a:spcPts val="1680"/>
+              </a:lnSpc>
+              <a:buNone/>
+            </a:pPr>
+            <a:r>
+              <a:rPr lang="en-US" sz="1200" b="1" dirty="0">
+                <a:solidFill>
+                  <a:srgbClr val="8A5A00"/>
+                </a:solidFill>
+                <a:latin typeface="IBM Plex Sans" pitchFamily="34" charset="0"/>
+                <a:ea typeface="IBM Plex Sans" pitchFamily="34" charset="-122"/>
+                <a:cs typeface="IBM Plex Sans" pitchFamily="34" charset="-120"/>
+              </a:rPr>
+              <a:t>05</a:t>
+            </a:r>
+            <a:endParaRPr lang="en-US" sz="1200" dirty="0"/>
+          </a:p>
+        </p:txBody>
+      </p:sp>
+      <p:sp>
+        <p:nvSpPr>
+          <p:cNvPr id="21" name="Text 19"/>
+          <p:cNvSpPr/>
+          <p:nvPr/>
+        </p:nvSpPr>
+        <p:spPr>
+          <a:xfrm>
+            <a:off x="9565640" y="1950721"/>
+            <a:ext cx="1686560" cy="254000"/>
+          </a:xfrm>
+          <a:prstGeom prst="rect">
+            <a:avLst/>
+          </a:prstGeom>
+          <a:noFill/>
+          <a:ln/>
+        </p:spPr>
+        <p:txBody>
+          <a:bodyPr wrap="square" lIns="0" tIns="0" rIns="0" bIns="0" rtlCol="0" anchor="t">
+            <a:normAutofit/>
+          </a:bodyPr>
+          <a:lstStyle/>
+          <a:p>
+            <a:pPr algn="l" indent="0" marL="0">
+              <a:lnSpc>
+                <a:spcPts val="1800"/>
+              </a:lnSpc>
+              <a:buNone/>
+            </a:pPr>
+            <a:r>
+              <a:rPr lang="en-US" sz="1500" b="1" dirty="0">
+                <a:solidFill>
+                  <a:srgbClr val="14213D"/>
+                </a:solidFill>
+                <a:latin typeface="IBM Plex Sans" pitchFamily="34" charset="0"/>
+                <a:ea typeface="IBM Plex Sans" pitchFamily="34" charset="-122"/>
+                <a:cs typeface="IBM Plex Sans" pitchFamily="34" charset="-120"/>
+              </a:rPr>
+              <a:t>Obnovení</a:t>
+            </a:r>
+            <a:endParaRPr lang="en-US" sz="1500" dirty="0"/>
+          </a:p>
+        </p:txBody>
+      </p:sp>
+      <p:sp>
+        <p:nvSpPr>
+          <p:cNvPr id="22" name="Text 20"/>
+          <p:cNvSpPr/>
+          <p:nvPr/>
+        </p:nvSpPr>
+        <p:spPr>
+          <a:xfrm>
+            <a:off x="9565640" y="2255521"/>
+            <a:ext cx="1686560" cy="949960"/>
+          </a:xfrm>
+          <a:prstGeom prst="rect">
+            <a:avLst/>
+          </a:prstGeom>
+          <a:noFill/>
+          <a:ln/>
+        </p:spPr>
+        <p:txBody>
+          <a:bodyPr wrap="square" lIns="0" tIns="0" rIns="0" bIns="0" rtlCol="0" anchor="t">
+            <a:normAutofit/>
+          </a:bodyPr>
+          <a:lstStyle/>
+          <a:p>
+            <a:pPr algn="l" indent="0" marL="0">
+              <a:lnSpc>
+                <a:spcPts val="1820"/>
+              </a:lnSpc>
+              <a:buNone/>
+            </a:pPr>
+            <a:r>
+              <a:rPr lang="en-US" sz="1300" dirty="0">
+                <a:solidFill>
+                  <a:srgbClr val="14213D"/>
+                </a:solidFill>
+                <a:latin typeface="IBM Plex Sans" pitchFamily="34" charset="0"/>
+                <a:ea typeface="IBM Plex Sans" pitchFamily="34" charset="-122"/>
+                <a:cs typeface="IBM Plex Sans" pitchFamily="34" charset="-120"/>
+              </a:rPr>
+              <a:t>Další přihlášení požadavky i výsledky vrátí zpět.</a:t>
+            </a:r>
+            <a:endParaRPr lang="en-US" sz="1300" dirty="0"/>
+          </a:p>
+        </p:txBody>
+      </p:sp>
+      <p:sp>
+        <p:nvSpPr>
+          <p:cNvPr id="23" name="Text 21"/>
+          <p:cNvSpPr/>
+          <p:nvPr/>
+        </p:nvSpPr>
+        <p:spPr>
+          <a:xfrm>
+            <a:off x="812800" y="3561082"/>
+            <a:ext cx="10883392" cy="256540"/>
+          </a:xfrm>
+          <a:prstGeom prst="rect">
+            <a:avLst/>
+          </a:prstGeom>
+          <a:noFill/>
+          <a:ln/>
+        </p:spPr>
+        <p:txBody>
+          <a:bodyPr wrap="square" lIns="0" tIns="0" rIns="0" bIns="0" rtlCol="0" anchor="t">
+            <a:normAutofit/>
+          </a:bodyPr>
+          <a:lstStyle/>
+          <a:p>
+            <a:pPr algn="l" indent="0" marL="0">
+              <a:lnSpc>
+                <a:spcPts val="1820"/>
+              </a:lnSpc>
+              <a:buNone/>
+            </a:pPr>
+            <a:r>
+              <a:rPr lang="en-US" sz="1300" dirty="0">
+                <a:solidFill>
+                  <a:srgbClr val="56607A"/>
+                </a:solidFill>
+                <a:latin typeface="IBM Plex Sans" pitchFamily="34" charset="0"/>
+                <a:ea typeface="IBM Plex Sans" pitchFamily="34" charset="-122"/>
+                <a:cs typeface="IBM Plex Sans" pitchFamily="34" charset="-120"/>
+              </a:rPr>
+              <a:t>Zelená: UI · Žlutá: AI vrstva · Šedá: backend bez AI</a:t>
+            </a:r>
+            <a:endParaRPr lang="en-US" sz="1300" dirty="0"/>
+          </a:p>
+        </p:txBody>
+      </p:sp>
+      <p:sp>
+        <p:nvSpPr>
+          <p:cNvPr id="24" name="Text 22"/>
+          <p:cNvSpPr/>
+          <p:nvPr/>
+        </p:nvSpPr>
+        <p:spPr>
+          <a:xfrm>
+            <a:off x="812800" y="3995421"/>
+            <a:ext cx="10883392" cy="322580"/>
+          </a:xfrm>
+          <a:prstGeom prst="rect">
+            <a:avLst/>
+          </a:prstGeom>
+          <a:noFill/>
+          <a:ln/>
+        </p:spPr>
+        <p:txBody>
+          <a:bodyPr wrap="square" lIns="0" tIns="0" rIns="0" bIns="0" rtlCol="0" anchor="t">
+            <a:normAutofit/>
+          </a:bodyPr>
+          <a:lstStyle/>
+          <a:p>
+            <a:pPr algn="l" indent="0" marL="0">
+              <a:lnSpc>
+                <a:spcPts val="2340"/>
+              </a:lnSpc>
+              <a:buNone/>
+            </a:pPr>
+            <a:r>
+              <a:rPr lang="en-US" sz="1800" b="1" dirty="0">
+                <a:solidFill>
+                  <a:srgbClr val="0B7A6E"/>
+                </a:solidFill>
+                <a:latin typeface="IBM Plex Sans" pitchFamily="34" charset="0"/>
+                <a:ea typeface="IBM Plex Sans" pitchFamily="34" charset="-122"/>
+                <a:cs typeface="IBM Plex Sans" pitchFamily="34" charset="-120"/>
+              </a:rPr>
+              <a:t>Bez přihlášení požadavky zmizí s kartou. S přihlášením přežijí odhlášení i reload.</a:t>
+            </a:r>
+            <a:endParaRPr lang="en-US" sz="1800" dirty="0"/>
+          </a:p>
+        </p:txBody>
+      </p:sp>
+      <p:sp>
+        <p:nvSpPr>
+          <p:cNvPr id="25" name="Text 23"/>
+          <p:cNvSpPr/>
+          <p:nvPr/>
+        </p:nvSpPr>
+        <p:spPr>
+          <a:xfrm>
+            <a:off x="495808" y="6238239"/>
+            <a:ext cx="10883392" cy="238760"/>
+          </a:xfrm>
+          <a:prstGeom prst="rect">
+            <a:avLst/>
+          </a:prstGeom>
+          <a:noFill/>
+          <a:ln/>
+        </p:spPr>
+        <p:txBody>
+          <a:bodyPr wrap="square" lIns="0" tIns="0" rIns="0" bIns="0" rtlCol="0" anchor="t">
+            <a:normAutofit/>
+          </a:bodyPr>
+          <a:lstStyle/>
+          <a:p>
+            <a:pPr algn="r" indent="0" marL="0">
+              <a:lnSpc>
+                <a:spcPts val="1680"/>
+              </a:lnSpc>
+              <a:buNone/>
+            </a:pPr>
+            <a:r>
+              <a:rPr lang="en-US" sz="1200" dirty="0">
+                <a:solidFill>
+                  <a:srgbClr val="56607A"/>
+                </a:solidFill>
+                <a:latin typeface="IBM Plex Sans" pitchFamily="34" charset="0"/>
+                <a:ea typeface="IBM Plex Sans" pitchFamily="34" charset="-122"/>
+                <a:cs typeface="IBM Plex Sans" pitchFamily="34" charset="-120"/>
+              </a:rPr>
+              <a:t>DriveWise AI · Architektura · 12</a:t>
             </a:r>
             <a:endParaRPr lang="en-US" sz="1200" dirty="0"/>
           </a:p>
